--- a/Presentacion propuesta TG.pptx
+++ b/Presentacion propuesta TG.pptx
@@ -7424,10 +7424,10 @@
       </p:sp>
       <p:pic>
         <p:nvPicPr>
-          <p:cNvPr id="4" name="Image3">
+          <p:cNvPr id="6" name="Picture 5">
             <a:extLst>
               <a:ext uri="{FF2B5EF4-FFF2-40B4-BE49-F238E27FC236}">
-                <a16:creationId xmlns:a16="http://schemas.microsoft.com/office/drawing/2014/main" id="{36588103-6E37-16A0-DA84-0C7FE887E402}"/>
+                <a16:creationId xmlns:a16="http://schemas.microsoft.com/office/drawing/2014/main" id="{821976CD-91E5-C147-B141-049242AD224F}"/>
               </a:ext>
             </a:extLst>
           </p:cNvPr>
@@ -7438,14 +7438,15 @@
         </p:nvPicPr>
         <p:blipFill>
           <a:blip r:embed="rId2"/>
+          <a:srcRect b="2725"/>
           <a:stretch>
             <a:fillRect/>
           </a:stretch>
         </p:blipFill>
-        <p:spPr bwMode="auto">
+        <p:spPr>
           <a:xfrm>
-            <a:off x="1610846" y="957532"/>
-            <a:ext cx="8454167" cy="5323493"/>
+            <a:off x="356270" y="1121434"/>
+            <a:ext cx="11042099" cy="4692770"/>
           </a:xfrm>
           <a:prstGeom prst="rect">
             <a:avLst/>

--- a/Presentacion propuesta TG.pptx
+++ b/Presentacion propuesta TG.pptx
@@ -5,22 +5,25 @@
     <p:sldMasterId id="2147483648" r:id="rId1"/>
   </p:sldMasterIdLst>
   <p:handoutMasterIdLst>
-    <p:handoutMasterId r:id="rId15"/>
+    <p:handoutMasterId r:id="rId18"/>
   </p:handoutMasterIdLst>
   <p:sldIdLst>
     <p:sldId id="256" r:id="rId2"/>
-    <p:sldId id="260" r:id="rId3"/>
-    <p:sldId id="269" r:id="rId4"/>
-    <p:sldId id="261" r:id="rId5"/>
-    <p:sldId id="270" r:id="rId6"/>
-    <p:sldId id="262" r:id="rId7"/>
-    <p:sldId id="263" r:id="rId8"/>
-    <p:sldId id="273" r:id="rId9"/>
-    <p:sldId id="271" r:id="rId10"/>
-    <p:sldId id="264" r:id="rId11"/>
-    <p:sldId id="265" r:id="rId12"/>
-    <p:sldId id="268" r:id="rId13"/>
-    <p:sldId id="258" r:id="rId14"/>
+    <p:sldId id="274" r:id="rId3"/>
+    <p:sldId id="276" r:id="rId4"/>
+    <p:sldId id="275" r:id="rId5"/>
+    <p:sldId id="260" r:id="rId6"/>
+    <p:sldId id="269" r:id="rId7"/>
+    <p:sldId id="261" r:id="rId8"/>
+    <p:sldId id="270" r:id="rId9"/>
+    <p:sldId id="262" r:id="rId10"/>
+    <p:sldId id="263" r:id="rId11"/>
+    <p:sldId id="273" r:id="rId12"/>
+    <p:sldId id="271" r:id="rId13"/>
+    <p:sldId id="264" r:id="rId14"/>
+    <p:sldId id="265" r:id="rId15"/>
+    <p:sldId id="268" r:id="rId16"/>
+    <p:sldId id="258" r:id="rId17"/>
   </p:sldIdLst>
   <p:sldSz cx="12192000" cy="6858000"/>
   <p:notesSz cx="6858000" cy="9144000"/>
@@ -982,7 +985,7 @@
             <a:buNone/>
           </a:pPr>
           <a:r>
-            <a:rPr lang="es-CO">
+            <a:rPr lang="es-CO" dirty="0">
               <a:latin typeface="Avenir Next LT Pro"/>
               <a:ea typeface="+mn-ea"/>
               <a:cs typeface="+mn-cs"/>
@@ -990,20 +993,52 @@
             <a:t>Paso 2: </a:t>
           </a:r>
           <a:r>
-            <a:rPr lang="es-ES">
+            <a:rPr lang="en-US" dirty="0" err="1">
               <a:latin typeface="Avenir Next LT Pro"/>
               <a:ea typeface="+mn-ea"/>
               <a:cs typeface="+mn-cs"/>
             </a:rPr>
-            <a:t>Limpieza, optimización y validación del grafo</a:t>
+            <a:t>Construcción</a:t>
           </a:r>
           <a:r>
-            <a:rPr lang="es-CO">
+            <a:rPr lang="en-US" dirty="0">
               <a:latin typeface="Avenir Next LT Pro"/>
               <a:ea typeface="+mn-ea"/>
               <a:cs typeface="+mn-cs"/>
             </a:rPr>
-            <a:t> – 1 mes</a:t>
+            <a:t> </a:t>
+          </a:r>
+          <a:r>
+            <a:rPr lang="en-US" dirty="0" err="1">
+              <a:latin typeface="Avenir Next LT Pro"/>
+              <a:ea typeface="+mn-ea"/>
+              <a:cs typeface="+mn-cs"/>
+            </a:rPr>
+            <a:t>grafo</a:t>
+          </a:r>
+          <a:r>
+            <a:rPr lang="en-US" dirty="0">
+              <a:latin typeface="Avenir Next LT Pro"/>
+              <a:ea typeface="+mn-ea"/>
+              <a:cs typeface="+mn-cs"/>
+            </a:rPr>
+            <a:t> de </a:t>
+          </a:r>
+          <a:r>
+            <a:rPr lang="en-US" dirty="0" err="1">
+              <a:latin typeface="Avenir Next LT Pro"/>
+              <a:ea typeface="+mn-ea"/>
+              <a:cs typeface="+mn-cs"/>
+            </a:rPr>
+            <a:t>conocimientos</a:t>
+          </a:r>
+          <a:r>
+            <a:rPr lang="es-CO" dirty="0">
+              <a:latin typeface="Avenir Next LT Pro"/>
+              <a:ea typeface="+mn-ea"/>
+              <a:cs typeface="+mn-cs"/>
+            </a:rPr>
+            <a:t>– 1 mes</a:t>
           </a:r>
           <a:endParaRPr lang="en-US" dirty="0">
             <a:latin typeface="Avenir Next LT Pro"/>
@@ -2251,7 +2286,7 @@
             <a:buNone/>
           </a:pPr>
           <a:r>
-            <a:rPr lang="es-CO" sz="900" kern="1200">
+            <a:rPr lang="es-CO" sz="900" kern="1200" dirty="0">
               <a:latin typeface="Avenir Next LT Pro"/>
               <a:ea typeface="+mn-ea"/>
               <a:cs typeface="+mn-cs"/>
@@ -2259,20 +2294,52 @@
             <a:t>Paso 2: </a:t>
           </a:r>
           <a:r>
-            <a:rPr lang="es-ES" sz="900" kern="1200">
+            <a:rPr lang="en-US" sz="900" kern="1200" dirty="0" err="1">
               <a:latin typeface="Avenir Next LT Pro"/>
               <a:ea typeface="+mn-ea"/>
               <a:cs typeface="+mn-cs"/>
             </a:rPr>
-            <a:t>Limpieza, optimización y validación del grafo</a:t>
+            <a:t>Construcción</a:t>
           </a:r>
           <a:r>
-            <a:rPr lang="es-CO" sz="900" kern="1200">
+            <a:rPr lang="en-US" sz="900" kern="1200" dirty="0">
               <a:latin typeface="Avenir Next LT Pro"/>
               <a:ea typeface="+mn-ea"/>
               <a:cs typeface="+mn-cs"/>
             </a:rPr>
-            <a:t> – 1 mes</a:t>
+            <a:t> </a:t>
+          </a:r>
+          <a:r>
+            <a:rPr lang="en-US" sz="900" kern="1200" dirty="0" err="1">
+              <a:latin typeface="Avenir Next LT Pro"/>
+              <a:ea typeface="+mn-ea"/>
+              <a:cs typeface="+mn-cs"/>
+            </a:rPr>
+            <a:t>grafo</a:t>
+          </a:r>
+          <a:r>
+            <a:rPr lang="en-US" sz="900" kern="1200" dirty="0">
+              <a:latin typeface="Avenir Next LT Pro"/>
+              <a:ea typeface="+mn-ea"/>
+              <a:cs typeface="+mn-cs"/>
+            </a:rPr>
+            <a:t> de </a:t>
+          </a:r>
+          <a:r>
+            <a:rPr lang="en-US" sz="900" kern="1200" dirty="0" err="1">
+              <a:latin typeface="Avenir Next LT Pro"/>
+              <a:ea typeface="+mn-ea"/>
+              <a:cs typeface="+mn-cs"/>
+            </a:rPr>
+            <a:t>conocimientos</a:t>
+          </a:r>
+          <a:r>
+            <a:rPr lang="es-CO" sz="900" kern="1200" dirty="0">
+              <a:latin typeface="Avenir Next LT Pro"/>
+              <a:ea typeface="+mn-ea"/>
+              <a:cs typeface="+mn-cs"/>
+            </a:rPr>
+            <a:t>– 1 mes</a:t>
           </a:r>
           <a:endParaRPr lang="en-US" sz="900" kern="1200" dirty="0">
             <a:latin typeface="Avenir Next LT Pro"/>
@@ -4741,7 +4808,7 @@
           <a:p>
             <a:fld id="{A2A58399-82A5-4F04-8671-5E74070C5E00}" type="datetimeFigureOut">
               <a:rPr lang="es-CO" smtClean="0"/>
-              <a:t>20/11/2025</a:t>
+              <a:t>2/12/2025</a:t>
             </a:fld>
             <a:endParaRPr lang="es-CO"/>
           </a:p>
@@ -6477,7 +6544,7 @@
           <a:p>
             <a:fld id="{AF0FCD54-9834-4BE8-9B5B-EEF02B5391B3}" type="datetimeFigureOut">
               <a:rPr lang="es-CO" smtClean="0"/>
-              <a:t>20/11/2025</a:t>
+              <a:t>2/12/2025</a:t>
             </a:fld>
             <a:endParaRPr lang="es-CO"/>
           </a:p>
@@ -7377,6 +7444,303 @@
   <p:cSld>
     <p:spTree>
       <p:nvGrpSpPr>
+        <p:cNvPr id="1" name="">
+          <a:extLst>
+            <a:ext uri="{FF2B5EF4-FFF2-40B4-BE49-F238E27FC236}">
+              <a16:creationId xmlns:a16="http://schemas.microsoft.com/office/drawing/2014/main" id="{C37B7228-28FD-8FF9-12CD-D59DF1A3D68D}"/>
+            </a:ext>
+          </a:extLst>
+        </p:cNvPr>
+        <p:cNvGrpSpPr/>
+        <p:nvPr/>
+      </p:nvGrpSpPr>
+      <p:grpSpPr>
+        <a:xfrm>
+          <a:off x="0" y="0"/>
+          <a:ext cx="0" cy="0"/>
+          <a:chOff x="0" y="0"/>
+          <a:chExt cx="0" cy="0"/>
+        </a:xfrm>
+      </p:grpSpPr>
+      <p:sp>
+        <p:nvSpPr>
+          <p:cNvPr id="2" name="Título 1">
+            <a:extLst>
+              <a:ext uri="{FF2B5EF4-FFF2-40B4-BE49-F238E27FC236}">
+                <a16:creationId xmlns:a16="http://schemas.microsoft.com/office/drawing/2014/main" id="{A3D015FC-D29A-8584-9A6F-9EF6556DFE3F}"/>
+              </a:ext>
+            </a:extLst>
+          </p:cNvPr>
+          <p:cNvSpPr>
+            <a:spLocks noGrp="1"/>
+          </p:cNvSpPr>
+          <p:nvPr>
+            <p:ph type="title"/>
+          </p:nvPr>
+        </p:nvSpPr>
+        <p:spPr>
+          <a:xfrm>
+            <a:off x="838200" y="189884"/>
+            <a:ext cx="10515600" cy="1325563"/>
+          </a:xfrm>
+        </p:spPr>
+        <p:txBody>
+          <a:bodyPr/>
+          <a:lstStyle/>
+          <a:p>
+            <a:r>
+              <a:rPr lang="es-CO" dirty="0"/>
+              <a:t>Metodología </a:t>
+            </a:r>
+          </a:p>
+        </p:txBody>
+      </p:sp>
+      <p:pic>
+        <p:nvPicPr>
+          <p:cNvPr id="4" name="Picture 3">
+            <a:extLst>
+              <a:ext uri="{FF2B5EF4-FFF2-40B4-BE49-F238E27FC236}">
+                <a16:creationId xmlns:a16="http://schemas.microsoft.com/office/drawing/2014/main" id="{CEEA1A9E-4D9A-3E23-B583-777B73502236}"/>
+              </a:ext>
+            </a:extLst>
+          </p:cNvPr>
+          <p:cNvPicPr>
+            <a:picLocks noChangeAspect="1"/>
+          </p:cNvPicPr>
+          <p:nvPr/>
+        </p:nvPicPr>
+        <p:blipFill>
+          <a:blip r:embed="rId2"/>
+          <a:stretch>
+            <a:fillRect/>
+          </a:stretch>
+        </p:blipFill>
+        <p:spPr bwMode="auto">
+          <a:xfrm>
+            <a:off x="1459858" y="1662497"/>
+            <a:ext cx="8305244" cy="3533006"/>
+          </a:xfrm>
+          <a:prstGeom prst="rect">
+            <a:avLst/>
+          </a:prstGeom>
+        </p:spPr>
+      </p:pic>
+    </p:spTree>
+    <p:extLst>
+      <p:ext uri="{BB962C8B-B14F-4D97-AF65-F5344CB8AC3E}">
+        <p14:creationId xmlns:p14="http://schemas.microsoft.com/office/powerpoint/2010/main" val="68818214"/>
+      </p:ext>
+    </p:extLst>
+  </p:cSld>
+  <p:clrMapOvr>
+    <a:masterClrMapping/>
+  </p:clrMapOvr>
+</p:sld>
+</file>
+
+<file path=ppt/slides/slide11.xml><?xml version="1.0" encoding="utf-8"?>
+<p:sld xmlns:a="http://schemas.openxmlformats.org/drawingml/2006/main" xmlns:r="http://schemas.openxmlformats.org/officeDocument/2006/relationships" xmlns:p="http://schemas.openxmlformats.org/presentationml/2006/main">
+  <p:cSld>
+    <p:spTree>
+      <p:nvGrpSpPr>
+        <p:cNvPr id="1" name="">
+          <a:extLst>
+            <a:ext uri="{FF2B5EF4-FFF2-40B4-BE49-F238E27FC236}">
+              <a16:creationId xmlns:a16="http://schemas.microsoft.com/office/drawing/2014/main" id="{EC39B1CB-7493-05BA-1DEE-35A37FAEE45D}"/>
+            </a:ext>
+          </a:extLst>
+        </p:cNvPr>
+        <p:cNvGrpSpPr/>
+        <p:nvPr/>
+      </p:nvGrpSpPr>
+      <p:grpSpPr>
+        <a:xfrm>
+          <a:off x="0" y="0"/>
+          <a:ext cx="0" cy="0"/>
+          <a:chOff x="0" y="0"/>
+          <a:chExt cx="0" cy="0"/>
+        </a:xfrm>
+      </p:grpSpPr>
+      <p:sp>
+        <p:nvSpPr>
+          <p:cNvPr id="2" name="Título 1">
+            <a:extLst>
+              <a:ext uri="{FF2B5EF4-FFF2-40B4-BE49-F238E27FC236}">
+                <a16:creationId xmlns:a16="http://schemas.microsoft.com/office/drawing/2014/main" id="{DB48ED13-4D91-99F3-0A00-6D5FB8B7C240}"/>
+              </a:ext>
+            </a:extLst>
+          </p:cNvPr>
+          <p:cNvSpPr>
+            <a:spLocks noGrp="1"/>
+          </p:cNvSpPr>
+          <p:nvPr>
+            <p:ph type="title"/>
+          </p:nvPr>
+        </p:nvSpPr>
+        <p:spPr>
+          <a:xfrm>
+            <a:off x="838200" y="189884"/>
+            <a:ext cx="10515600" cy="1325563"/>
+          </a:xfrm>
+        </p:spPr>
+        <p:txBody>
+          <a:bodyPr/>
+          <a:lstStyle/>
+          <a:p>
+            <a:r>
+              <a:rPr lang="es-CO" dirty="0"/>
+              <a:t>Metodología </a:t>
+            </a:r>
+          </a:p>
+        </p:txBody>
+      </p:sp>
+      <p:pic>
+        <p:nvPicPr>
+          <p:cNvPr id="3" name="Image2">
+            <a:extLst>
+              <a:ext uri="{FF2B5EF4-FFF2-40B4-BE49-F238E27FC236}">
+                <a16:creationId xmlns:a16="http://schemas.microsoft.com/office/drawing/2014/main" id="{98C4C66D-3508-DD59-E7C8-450D30C99005}"/>
+              </a:ext>
+            </a:extLst>
+          </p:cNvPr>
+          <p:cNvPicPr>
+            <a:picLocks noChangeAspect="1"/>
+          </p:cNvPicPr>
+          <p:nvPr/>
+        </p:nvPicPr>
+        <p:blipFill>
+          <a:blip r:embed="rId2"/>
+          <a:stretch>
+            <a:fillRect/>
+          </a:stretch>
+        </p:blipFill>
+        <p:spPr bwMode="auto">
+          <a:xfrm>
+            <a:off x="1026165" y="2329108"/>
+            <a:ext cx="9936394" cy="2199784"/>
+          </a:xfrm>
+          <a:prstGeom prst="rect">
+            <a:avLst/>
+          </a:prstGeom>
+        </p:spPr>
+      </p:pic>
+    </p:spTree>
+    <p:extLst>
+      <p:ext uri="{BB962C8B-B14F-4D97-AF65-F5344CB8AC3E}">
+        <p14:creationId xmlns:p14="http://schemas.microsoft.com/office/powerpoint/2010/main" val="641787714"/>
+      </p:ext>
+    </p:extLst>
+  </p:cSld>
+  <p:clrMapOvr>
+    <a:masterClrMapping/>
+  </p:clrMapOvr>
+</p:sld>
+</file>
+
+<file path=ppt/slides/slide12.xml><?xml version="1.0" encoding="utf-8"?>
+<p:sld xmlns:a="http://schemas.openxmlformats.org/drawingml/2006/main" xmlns:r="http://schemas.openxmlformats.org/officeDocument/2006/relationships" xmlns:p="http://schemas.openxmlformats.org/presentationml/2006/main">
+  <p:cSld>
+    <p:spTree>
+      <p:nvGrpSpPr>
+        <p:cNvPr id="1" name="">
+          <a:extLst>
+            <a:ext uri="{FF2B5EF4-FFF2-40B4-BE49-F238E27FC236}">
+              <a16:creationId xmlns:a16="http://schemas.microsoft.com/office/drawing/2014/main" id="{77F7C023-E280-A685-D766-F2957FFAF0F8}"/>
+            </a:ext>
+          </a:extLst>
+        </p:cNvPr>
+        <p:cNvGrpSpPr/>
+        <p:nvPr/>
+      </p:nvGrpSpPr>
+      <p:grpSpPr>
+        <a:xfrm>
+          <a:off x="0" y="0"/>
+          <a:ext cx="0" cy="0"/>
+          <a:chOff x="0" y="0"/>
+          <a:chExt cx="0" cy="0"/>
+        </a:xfrm>
+      </p:grpSpPr>
+      <p:sp>
+        <p:nvSpPr>
+          <p:cNvPr id="2" name="Título 1">
+            <a:extLst>
+              <a:ext uri="{FF2B5EF4-FFF2-40B4-BE49-F238E27FC236}">
+                <a16:creationId xmlns:a16="http://schemas.microsoft.com/office/drawing/2014/main" id="{DA7E848D-8A47-CE8E-3463-BBADEDAFE915}"/>
+              </a:ext>
+            </a:extLst>
+          </p:cNvPr>
+          <p:cNvSpPr>
+            <a:spLocks noGrp="1"/>
+          </p:cNvSpPr>
+          <p:nvPr>
+            <p:ph type="title"/>
+          </p:nvPr>
+        </p:nvSpPr>
+        <p:spPr>
+          <a:xfrm>
+            <a:off x="838200" y="62390"/>
+            <a:ext cx="10515600" cy="1325563"/>
+          </a:xfrm>
+        </p:spPr>
+        <p:txBody>
+          <a:bodyPr/>
+          <a:lstStyle/>
+          <a:p>
+            <a:r>
+              <a:rPr lang="es-CO" dirty="0"/>
+              <a:t>Metodología </a:t>
+            </a:r>
+          </a:p>
+        </p:txBody>
+      </p:sp>
+      <p:graphicFrame>
+        <p:nvGraphicFramePr>
+          <p:cNvPr id="5" name="Marcador de contenido 2">
+            <a:extLst>
+              <a:ext uri="{FF2B5EF4-FFF2-40B4-BE49-F238E27FC236}">
+                <a16:creationId xmlns:a16="http://schemas.microsoft.com/office/drawing/2014/main" id="{8DF60821-9F66-0239-9CAE-4C1564F108F9}"/>
+              </a:ext>
+            </a:extLst>
+          </p:cNvPr>
+          <p:cNvGraphicFramePr>
+            <a:graphicFrameLocks/>
+          </p:cNvGraphicFramePr>
+          <p:nvPr>
+            <p:extLst>
+              <p:ext uri="{D42A27DB-BD31-4B8C-83A1-F6EECF244321}">
+                <p14:modId xmlns:p14="http://schemas.microsoft.com/office/powerpoint/2010/main" val="962018006"/>
+              </p:ext>
+            </p:extLst>
+          </p:nvPr>
+        </p:nvGraphicFramePr>
+        <p:xfrm>
+          <a:off x="838200" y="1105302"/>
+          <a:ext cx="9909319" cy="5106838"/>
+        </p:xfrm>
+        <a:graphic>
+          <a:graphicData uri="http://schemas.openxmlformats.org/drawingml/2006/diagram">
+            <dgm:relIds xmlns:dgm="http://schemas.openxmlformats.org/drawingml/2006/diagram" xmlns:r="http://schemas.openxmlformats.org/officeDocument/2006/relationships" r:dm="rId2" r:lo="rId3" r:qs="rId4" r:cs="rId5"/>
+          </a:graphicData>
+        </a:graphic>
+      </p:graphicFrame>
+    </p:spTree>
+    <p:extLst>
+      <p:ext uri="{BB962C8B-B14F-4D97-AF65-F5344CB8AC3E}">
+        <p14:creationId xmlns:p14="http://schemas.microsoft.com/office/powerpoint/2010/main" val="4074060335"/>
+      </p:ext>
+    </p:extLst>
+  </p:cSld>
+  <p:clrMapOvr>
+    <a:masterClrMapping/>
+  </p:clrMapOvr>
+</p:sld>
+</file>
+
+<file path=ppt/slides/slide13.xml><?xml version="1.0" encoding="utf-8"?>
+<p:sld xmlns:a="http://schemas.openxmlformats.org/drawingml/2006/main" xmlns:r="http://schemas.openxmlformats.org/officeDocument/2006/relationships" xmlns:p="http://schemas.openxmlformats.org/presentationml/2006/main">
+  <p:cSld>
+    <p:spTree>
+      <p:nvGrpSpPr>
         <p:cNvPr id="1" name=""/>
         <p:cNvGrpSpPr/>
         <p:nvPr/>
@@ -7424,10 +7788,10 @@
       </p:sp>
       <p:pic>
         <p:nvPicPr>
-          <p:cNvPr id="6" name="Picture 5">
+          <p:cNvPr id="4" name="Picture 3">
             <a:extLst>
               <a:ext uri="{FF2B5EF4-FFF2-40B4-BE49-F238E27FC236}">
-                <a16:creationId xmlns:a16="http://schemas.microsoft.com/office/drawing/2014/main" id="{821976CD-91E5-C147-B141-049242AD224F}"/>
+                <a16:creationId xmlns:a16="http://schemas.microsoft.com/office/drawing/2014/main" id="{140BF9BE-B06E-8BB1-86B6-7C62067A5A21}"/>
               </a:ext>
             </a:extLst>
           </p:cNvPr>
@@ -7438,15 +7802,14 @@
         </p:nvPicPr>
         <p:blipFill>
           <a:blip r:embed="rId2"/>
-          <a:srcRect b="2725"/>
           <a:stretch>
             <a:fillRect/>
           </a:stretch>
         </p:blipFill>
         <p:spPr>
           <a:xfrm>
-            <a:off x="356270" y="1121434"/>
-            <a:ext cx="11042099" cy="4692770"/>
+            <a:off x="504815" y="1121434"/>
+            <a:ext cx="11027096" cy="4892464"/>
           </a:xfrm>
           <a:prstGeom prst="rect">
             <a:avLst/>
@@ -7466,7 +7829,7 @@
 </p:sld>
 </file>
 
-<file path=ppt/slides/slide11.xml><?xml version="1.0" encoding="utf-8"?>
+<file path=ppt/slides/slide14.xml><?xml version="1.0" encoding="utf-8"?>
 <p:sld xmlns:a="http://schemas.openxmlformats.org/drawingml/2006/main" xmlns:r="http://schemas.openxmlformats.org/officeDocument/2006/relationships" xmlns:p="http://schemas.openxmlformats.org/presentationml/2006/main">
   <p:cSld>
     <p:spTree>
@@ -7611,7 +7974,15 @@
             </a:r>
             <a:r>
               <a:rPr lang="es-ES" sz="1400" dirty="0"/>
-              <a:t>, aplicada a la evaluación de respuestas mediante criterios definidos,</a:t>
+              <a:t>, aplicada a la evaluación de respuestas mediante criterios definidos. (RAG vs </a:t>
+            </a:r>
+            <a:r>
+              <a:rPr lang="es-ES" sz="1400" dirty="0" err="1"/>
+              <a:t>graphRAG</a:t>
+            </a:r>
+            <a:r>
+              <a:rPr lang="es-ES" sz="1400" dirty="0"/>
+              <a:t>)</a:t>
             </a:r>
             <a:endParaRPr lang="en-US" sz="1400" dirty="0"/>
           </a:p>
@@ -7670,7 +8041,7 @@
 </p:sld>
 </file>
 
-<file path=ppt/slides/slide12.xml><?xml version="1.0" encoding="utf-8"?>
+<file path=ppt/slides/slide15.xml><?xml version="1.0" encoding="utf-8"?>
 <p:sld xmlns:a="http://schemas.openxmlformats.org/drawingml/2006/main" xmlns:r="http://schemas.openxmlformats.org/officeDocument/2006/relationships" xmlns:p="http://schemas.openxmlformats.org/presentationml/2006/main">
   <p:cSld>
     <p:spTree>
@@ -8026,7 +8397,7 @@
 </p:sld>
 </file>
 
-<file path=ppt/slides/slide13.xml><?xml version="1.0" encoding="utf-8"?>
+<file path=ppt/slides/slide16.xml><?xml version="1.0" encoding="utf-8"?>
 <p:sld xmlns:a="http://schemas.openxmlformats.org/drawingml/2006/main" xmlns:r="http://schemas.openxmlformats.org/officeDocument/2006/relationships" xmlns:p="http://schemas.openxmlformats.org/presentationml/2006/main">
   <p:cSld>
     <p:spTree>
@@ -8061,6 +8432,799 @@
   <p:cSld>
     <p:spTree>
       <p:nvGrpSpPr>
+        <p:cNvPr id="1" name="">
+          <a:extLst>
+            <a:ext uri="{FF2B5EF4-FFF2-40B4-BE49-F238E27FC236}">
+              <a16:creationId xmlns:a16="http://schemas.microsoft.com/office/drawing/2014/main" id="{A8DAC660-F74D-41D7-CD25-0630F75CFAA5}"/>
+            </a:ext>
+          </a:extLst>
+        </p:cNvPr>
+        <p:cNvGrpSpPr/>
+        <p:nvPr/>
+      </p:nvGrpSpPr>
+      <p:grpSpPr>
+        <a:xfrm>
+          <a:off x="0" y="0"/>
+          <a:ext cx="0" cy="0"/>
+          <a:chOff x="0" y="0"/>
+          <a:chExt cx="0" cy="0"/>
+        </a:xfrm>
+      </p:grpSpPr>
+      <p:sp>
+        <p:nvSpPr>
+          <p:cNvPr id="2" name="Título 1">
+            <a:extLst>
+              <a:ext uri="{FF2B5EF4-FFF2-40B4-BE49-F238E27FC236}">
+                <a16:creationId xmlns:a16="http://schemas.microsoft.com/office/drawing/2014/main" id="{1632BF06-CBDA-769F-A247-110D8EA14082}"/>
+              </a:ext>
+            </a:extLst>
+          </p:cNvPr>
+          <p:cNvSpPr>
+            <a:spLocks noGrp="1"/>
+          </p:cNvSpPr>
+          <p:nvPr>
+            <p:ph type="title"/>
+          </p:nvPr>
+        </p:nvSpPr>
+        <p:spPr>
+          <a:xfrm>
+            <a:off x="838200" y="195913"/>
+            <a:ext cx="10515600" cy="666729"/>
+          </a:xfrm>
+        </p:spPr>
+        <p:txBody>
+          <a:bodyPr>
+            <a:normAutofit fontScale="90000"/>
+          </a:bodyPr>
+          <a:lstStyle/>
+          <a:p>
+            <a:r>
+              <a:rPr lang="es-CO" dirty="0"/>
+              <a:t>Descripción de la problemática </a:t>
+            </a:r>
+          </a:p>
+        </p:txBody>
+      </p:sp>
+      <p:sp>
+        <p:nvSpPr>
+          <p:cNvPr id="3" name="Marcador de contenido 2">
+            <a:extLst>
+              <a:ext uri="{FF2B5EF4-FFF2-40B4-BE49-F238E27FC236}">
+                <a16:creationId xmlns:a16="http://schemas.microsoft.com/office/drawing/2014/main" id="{D11E0440-CB38-84F6-B942-9B0C649971EC}"/>
+              </a:ext>
+            </a:extLst>
+          </p:cNvPr>
+          <p:cNvSpPr>
+            <a:spLocks noGrp="1"/>
+          </p:cNvSpPr>
+          <p:nvPr>
+            <p:ph idx="1"/>
+          </p:nvPr>
+        </p:nvSpPr>
+        <p:spPr>
+          <a:xfrm>
+            <a:off x="424132" y="1328610"/>
+            <a:ext cx="6226834" cy="3828726"/>
+          </a:xfrm>
+        </p:spPr>
+        <p:txBody>
+          <a:bodyPr>
+            <a:normAutofit/>
+          </a:bodyPr>
+          <a:lstStyle/>
+          <a:p>
+            <a:pPr marL="0" indent="0">
+              <a:buNone/>
+            </a:pPr>
+            <a:r>
+              <a:rPr lang="es-ES" sz="1600" b="1" dirty="0"/>
+              <a:t>Primero que todo, ¿Qué es </a:t>
+            </a:r>
+            <a:r>
+              <a:rPr lang="es-ES" sz="1600" b="1" dirty="0" err="1"/>
+              <a:t>Hugging</a:t>
+            </a:r>
+            <a:r>
+              <a:rPr lang="es-ES" sz="1600" b="1" dirty="0"/>
+              <a:t> </a:t>
+            </a:r>
+            <a:r>
+              <a:rPr lang="es-ES" sz="1600" b="1" dirty="0" err="1"/>
+              <a:t>Face</a:t>
+            </a:r>
+            <a:r>
+              <a:rPr lang="es-ES" sz="1600" b="1" dirty="0"/>
+              <a:t>?</a:t>
+            </a:r>
+            <a:endParaRPr lang="es-ES" sz="1400" dirty="0"/>
+          </a:p>
+          <a:p>
+            <a:pPr marL="0" indent="0">
+              <a:buNone/>
+            </a:pPr>
+            <a:endParaRPr lang="es-ES" sz="1400" dirty="0"/>
+          </a:p>
+          <a:p>
+            <a:r>
+              <a:rPr lang="es-ES_tradnl" sz="1400" dirty="0"/>
+              <a:t>La plataforma </a:t>
+            </a:r>
+            <a:r>
+              <a:rPr lang="es-ES_tradnl" sz="1400" dirty="0" err="1"/>
+              <a:t>Hugging</a:t>
+            </a:r>
+            <a:r>
+              <a:rPr lang="es-ES_tradnl" sz="1400" dirty="0"/>
+              <a:t> </a:t>
+            </a:r>
+            <a:r>
+              <a:rPr lang="es-ES_tradnl" sz="1400" dirty="0" err="1"/>
+              <a:t>Face</a:t>
+            </a:r>
+            <a:r>
+              <a:rPr lang="es-ES_tradnl" sz="1400" dirty="0"/>
+              <a:t> (HF) se ha consolidado como un centro crucial para el desarrollo y la colaboración en proyectos de Machine </a:t>
+            </a:r>
+            <a:r>
+              <a:rPr lang="es-ES_tradnl" sz="1400" dirty="0" err="1"/>
+              <a:t>Learning</a:t>
+            </a:r>
+            <a:r>
+              <a:rPr lang="es-ES_tradnl" sz="1400" dirty="0"/>
+              <a:t>, facilitando el intercambio de modelos </a:t>
+            </a:r>
+            <a:r>
+              <a:rPr lang="es-ES_tradnl" sz="1400" dirty="0" err="1"/>
+              <a:t>preentrenados</a:t>
+            </a:r>
+            <a:r>
+              <a:rPr lang="es-ES_tradnl" sz="1400" dirty="0"/>
+              <a:t>, conjuntos de datos y espacios (</a:t>
+            </a:r>
+            <a:r>
+              <a:rPr lang="es-ES_tradnl" sz="1400" dirty="0" err="1"/>
+              <a:t>Ait</a:t>
+            </a:r>
+            <a:r>
+              <a:rPr lang="es-ES_tradnl" sz="1400" dirty="0"/>
+              <a:t> et al 2024). </a:t>
+            </a:r>
+            <a:endParaRPr lang="es-CO" sz="1400" dirty="0"/>
+          </a:p>
+        </p:txBody>
+      </p:sp>
+      <p:pic>
+        <p:nvPicPr>
+          <p:cNvPr id="1028" name="Picture 4" descr="Democratizing AI: The Hugging Face Ethos of Accessible ML">
+            <a:extLst>
+              <a:ext uri="{FF2B5EF4-FFF2-40B4-BE49-F238E27FC236}">
+                <a16:creationId xmlns:a16="http://schemas.microsoft.com/office/drawing/2014/main" id="{D442735A-5F3D-352D-7D78-53DA3CF37A5A}"/>
+              </a:ext>
+            </a:extLst>
+          </p:cNvPr>
+          <p:cNvPicPr>
+            <a:picLocks noChangeAspect="1" noChangeArrowheads="1"/>
+          </p:cNvPicPr>
+          <p:nvPr/>
+        </p:nvPicPr>
+        <p:blipFill>
+          <a:blip r:embed="rId2" cstate="print">
+            <a:extLst>
+              <a:ext uri="{28A0092B-C50C-407E-A947-70E740481C1C}">
+                <a14:useLocalDpi xmlns:a14="http://schemas.microsoft.com/office/drawing/2010/main" val="0"/>
+              </a:ext>
+            </a:extLst>
+          </a:blip>
+          <a:srcRect/>
+          <a:stretch>
+            <a:fillRect/>
+          </a:stretch>
+        </p:blipFill>
+        <p:spPr bwMode="auto">
+          <a:xfrm>
+            <a:off x="2578145" y="4155322"/>
+            <a:ext cx="1918808" cy="1279205"/>
+          </a:xfrm>
+          <a:prstGeom prst="rect">
+            <a:avLst/>
+          </a:prstGeom>
+          <a:noFill/>
+          <a:extLst>
+            <a:ext uri="{909E8E84-426E-40DD-AFC4-6F175D3DCCD1}">
+              <a14:hiddenFill xmlns:a14="http://schemas.microsoft.com/office/drawing/2010/main">
+                <a:solidFill>
+                  <a:srgbClr val="FFFFFF"/>
+                </a:solidFill>
+              </a14:hiddenFill>
+            </a:ext>
+          </a:extLst>
+        </p:spPr>
+      </p:pic>
+      <p:pic>
+        <p:nvPicPr>
+          <p:cNvPr id="7" name="Picture 6">
+            <a:extLst>
+              <a:ext uri="{FF2B5EF4-FFF2-40B4-BE49-F238E27FC236}">
+                <a16:creationId xmlns:a16="http://schemas.microsoft.com/office/drawing/2014/main" id="{D35B0A04-39BD-242E-0A53-5C76EF2C6D89}"/>
+              </a:ext>
+            </a:extLst>
+          </p:cNvPr>
+          <p:cNvPicPr>
+            <a:picLocks noChangeAspect="1"/>
+          </p:cNvPicPr>
+          <p:nvPr/>
+        </p:nvPicPr>
+        <p:blipFill>
+          <a:blip r:embed="rId3"/>
+          <a:stretch>
+            <a:fillRect/>
+          </a:stretch>
+        </p:blipFill>
+        <p:spPr>
+          <a:xfrm>
+            <a:off x="6783939" y="1716655"/>
+            <a:ext cx="4983929" cy="4071669"/>
+          </a:xfrm>
+          <a:prstGeom prst="rect">
+            <a:avLst/>
+          </a:prstGeom>
+        </p:spPr>
+      </p:pic>
+      <p:pic>
+        <p:nvPicPr>
+          <p:cNvPr id="9" name="Picture 8">
+            <a:extLst>
+              <a:ext uri="{FF2B5EF4-FFF2-40B4-BE49-F238E27FC236}">
+                <a16:creationId xmlns:a16="http://schemas.microsoft.com/office/drawing/2014/main" id="{C42372CE-928A-1401-D761-98C176A0FF5F}"/>
+              </a:ext>
+            </a:extLst>
+          </p:cNvPr>
+          <p:cNvPicPr>
+            <a:picLocks noChangeAspect="1"/>
+          </p:cNvPicPr>
+          <p:nvPr/>
+        </p:nvPicPr>
+        <p:blipFill>
+          <a:blip r:embed="rId4"/>
+          <a:stretch>
+            <a:fillRect/>
+          </a:stretch>
+        </p:blipFill>
+        <p:spPr>
+          <a:xfrm>
+            <a:off x="571535" y="3648373"/>
+            <a:ext cx="5449703" cy="506949"/>
+          </a:xfrm>
+          <a:prstGeom prst="rect">
+            <a:avLst/>
+          </a:prstGeom>
+        </p:spPr>
+      </p:pic>
+      <p:sp>
+        <p:nvSpPr>
+          <p:cNvPr id="10" name="Arrow: Right 9">
+            <a:extLst>
+              <a:ext uri="{FF2B5EF4-FFF2-40B4-BE49-F238E27FC236}">
+                <a16:creationId xmlns:a16="http://schemas.microsoft.com/office/drawing/2014/main" id="{8A06C458-62F4-5398-A818-4D10205B3FE2}"/>
+              </a:ext>
+            </a:extLst>
+          </p:cNvPr>
+          <p:cNvSpPr/>
+          <p:nvPr/>
+        </p:nvSpPr>
+        <p:spPr>
+          <a:xfrm>
+            <a:off x="6461185" y="3648373"/>
+            <a:ext cx="379562" cy="81951"/>
+          </a:xfrm>
+          <a:prstGeom prst="rightArrow">
+            <a:avLst/>
+          </a:prstGeom>
+          <a:solidFill>
+            <a:srgbClr val="FF0000"/>
+          </a:solidFill>
+          <a:ln>
+            <a:noFill/>
+          </a:ln>
+        </p:spPr>
+        <p:style>
+          <a:lnRef idx="2">
+            <a:schemeClr val="accent1">
+              <a:shade val="15000"/>
+            </a:schemeClr>
+          </a:lnRef>
+          <a:fillRef idx="1">
+            <a:schemeClr val="accent1"/>
+          </a:fillRef>
+          <a:effectRef idx="0">
+            <a:schemeClr val="accent1"/>
+          </a:effectRef>
+          <a:fontRef idx="minor">
+            <a:schemeClr val="lt1"/>
+          </a:fontRef>
+        </p:style>
+        <p:txBody>
+          <a:bodyPr rtlCol="0" anchor="ctr"/>
+          <a:lstStyle/>
+          <a:p>
+            <a:pPr algn="ctr"/>
+            <a:endParaRPr lang="en-US"/>
+          </a:p>
+        </p:txBody>
+      </p:sp>
+      <p:sp>
+        <p:nvSpPr>
+          <p:cNvPr id="11" name="Arrow: Right 10">
+            <a:extLst>
+              <a:ext uri="{FF2B5EF4-FFF2-40B4-BE49-F238E27FC236}">
+                <a16:creationId xmlns:a16="http://schemas.microsoft.com/office/drawing/2014/main" id="{6CFDF240-3783-5CC2-C92E-5A41F05C5DF2}"/>
+              </a:ext>
+            </a:extLst>
+          </p:cNvPr>
+          <p:cNvSpPr/>
+          <p:nvPr/>
+        </p:nvSpPr>
+        <p:spPr>
+          <a:xfrm>
+            <a:off x="6461185" y="3180391"/>
+            <a:ext cx="379562" cy="81951"/>
+          </a:xfrm>
+          <a:prstGeom prst="rightArrow">
+            <a:avLst/>
+          </a:prstGeom>
+          <a:solidFill>
+            <a:srgbClr val="FF0000"/>
+          </a:solidFill>
+          <a:ln>
+            <a:noFill/>
+          </a:ln>
+        </p:spPr>
+        <p:style>
+          <a:lnRef idx="2">
+            <a:schemeClr val="accent1">
+              <a:shade val="15000"/>
+            </a:schemeClr>
+          </a:lnRef>
+          <a:fillRef idx="1">
+            <a:schemeClr val="accent1"/>
+          </a:fillRef>
+          <a:effectRef idx="0">
+            <a:schemeClr val="accent1"/>
+          </a:effectRef>
+          <a:fontRef idx="minor">
+            <a:schemeClr val="lt1"/>
+          </a:fontRef>
+        </p:style>
+        <p:txBody>
+          <a:bodyPr rtlCol="0" anchor="ctr"/>
+          <a:lstStyle/>
+          <a:p>
+            <a:pPr algn="ctr"/>
+            <a:endParaRPr lang="en-US"/>
+          </a:p>
+        </p:txBody>
+      </p:sp>
+    </p:spTree>
+    <p:extLst>
+      <p:ext uri="{BB962C8B-B14F-4D97-AF65-F5344CB8AC3E}">
+        <p14:creationId xmlns:p14="http://schemas.microsoft.com/office/powerpoint/2010/main" val="828726019"/>
+      </p:ext>
+    </p:extLst>
+  </p:cSld>
+  <p:clrMapOvr>
+    <a:masterClrMapping/>
+  </p:clrMapOvr>
+</p:sld>
+</file>
+
+<file path=ppt/slides/slide3.xml><?xml version="1.0" encoding="utf-8"?>
+<p:sld xmlns:a="http://schemas.openxmlformats.org/drawingml/2006/main" xmlns:r="http://schemas.openxmlformats.org/officeDocument/2006/relationships" xmlns:p="http://schemas.openxmlformats.org/presentationml/2006/main">
+  <p:cSld>
+    <p:spTree>
+      <p:nvGrpSpPr>
+        <p:cNvPr id="1" name="">
+          <a:extLst>
+            <a:ext uri="{FF2B5EF4-FFF2-40B4-BE49-F238E27FC236}">
+              <a16:creationId xmlns:a16="http://schemas.microsoft.com/office/drawing/2014/main" id="{5855E52D-8882-0C9D-B5C9-212881B79650}"/>
+            </a:ext>
+          </a:extLst>
+        </p:cNvPr>
+        <p:cNvGrpSpPr/>
+        <p:nvPr/>
+      </p:nvGrpSpPr>
+      <p:grpSpPr>
+        <a:xfrm>
+          <a:off x="0" y="0"/>
+          <a:ext cx="0" cy="0"/>
+          <a:chOff x="0" y="0"/>
+          <a:chExt cx="0" cy="0"/>
+        </a:xfrm>
+      </p:grpSpPr>
+      <p:sp>
+        <p:nvSpPr>
+          <p:cNvPr id="2" name="Título 1">
+            <a:extLst>
+              <a:ext uri="{FF2B5EF4-FFF2-40B4-BE49-F238E27FC236}">
+                <a16:creationId xmlns:a16="http://schemas.microsoft.com/office/drawing/2014/main" id="{A2A50541-1706-514B-ED1D-CDCF546C582F}"/>
+              </a:ext>
+            </a:extLst>
+          </p:cNvPr>
+          <p:cNvSpPr>
+            <a:spLocks noGrp="1"/>
+          </p:cNvSpPr>
+          <p:nvPr>
+            <p:ph type="title"/>
+          </p:nvPr>
+        </p:nvSpPr>
+        <p:spPr>
+          <a:xfrm>
+            <a:off x="838200" y="195913"/>
+            <a:ext cx="10515600" cy="666729"/>
+          </a:xfrm>
+        </p:spPr>
+        <p:txBody>
+          <a:bodyPr>
+            <a:normAutofit fontScale="90000"/>
+          </a:bodyPr>
+          <a:lstStyle/>
+          <a:p>
+            <a:r>
+              <a:rPr lang="es-CO" dirty="0"/>
+              <a:t>Descripción de la problemática </a:t>
+            </a:r>
+          </a:p>
+        </p:txBody>
+      </p:sp>
+      <p:pic>
+        <p:nvPicPr>
+          <p:cNvPr id="8" name="Picture 7">
+            <a:extLst>
+              <a:ext uri="{FF2B5EF4-FFF2-40B4-BE49-F238E27FC236}">
+                <a16:creationId xmlns:a16="http://schemas.microsoft.com/office/drawing/2014/main" id="{786485E6-E51D-6CF0-E50A-9220A692A67F}"/>
+              </a:ext>
+            </a:extLst>
+          </p:cNvPr>
+          <p:cNvPicPr>
+            <a:picLocks noChangeAspect="1"/>
+          </p:cNvPicPr>
+          <p:nvPr/>
+        </p:nvPicPr>
+        <p:blipFill>
+          <a:blip r:embed="rId2"/>
+          <a:stretch>
+            <a:fillRect/>
+          </a:stretch>
+        </p:blipFill>
+        <p:spPr>
+          <a:xfrm>
+            <a:off x="838200" y="1239106"/>
+            <a:ext cx="5415951" cy="2482537"/>
+          </a:xfrm>
+          <a:prstGeom prst="rect">
+            <a:avLst/>
+          </a:prstGeom>
+        </p:spPr>
+      </p:pic>
+      <p:pic>
+        <p:nvPicPr>
+          <p:cNvPr id="13" name="Picture 12">
+            <a:extLst>
+              <a:ext uri="{FF2B5EF4-FFF2-40B4-BE49-F238E27FC236}">
+                <a16:creationId xmlns:a16="http://schemas.microsoft.com/office/drawing/2014/main" id="{5DE7257D-5EB7-BA8A-8F89-78C95D06693C}"/>
+              </a:ext>
+            </a:extLst>
+          </p:cNvPr>
+          <p:cNvPicPr>
+            <a:picLocks noChangeAspect="1"/>
+          </p:cNvPicPr>
+          <p:nvPr/>
+        </p:nvPicPr>
+        <p:blipFill>
+          <a:blip r:embed="rId3"/>
+          <a:stretch>
+            <a:fillRect/>
+          </a:stretch>
+        </p:blipFill>
+        <p:spPr>
+          <a:xfrm>
+            <a:off x="4950119" y="3925577"/>
+            <a:ext cx="7040249" cy="2271340"/>
+          </a:xfrm>
+          <a:prstGeom prst="rect">
+            <a:avLst/>
+          </a:prstGeom>
+        </p:spPr>
+      </p:pic>
+    </p:spTree>
+    <p:extLst>
+      <p:ext uri="{BB962C8B-B14F-4D97-AF65-F5344CB8AC3E}">
+        <p14:creationId xmlns:p14="http://schemas.microsoft.com/office/powerpoint/2010/main" val="1978967168"/>
+      </p:ext>
+    </p:extLst>
+  </p:cSld>
+  <p:clrMapOvr>
+    <a:masterClrMapping/>
+  </p:clrMapOvr>
+</p:sld>
+</file>
+
+<file path=ppt/slides/slide4.xml><?xml version="1.0" encoding="utf-8"?>
+<p:sld xmlns:a="http://schemas.openxmlformats.org/drawingml/2006/main" xmlns:r="http://schemas.openxmlformats.org/officeDocument/2006/relationships" xmlns:p="http://schemas.openxmlformats.org/presentationml/2006/main">
+  <p:cSld>
+    <p:spTree>
+      <p:nvGrpSpPr>
+        <p:cNvPr id="1" name="">
+          <a:extLst>
+            <a:ext uri="{FF2B5EF4-FFF2-40B4-BE49-F238E27FC236}">
+              <a16:creationId xmlns:a16="http://schemas.microsoft.com/office/drawing/2014/main" id="{FE1B9845-BEDC-50FF-F16F-D180341195BC}"/>
+            </a:ext>
+          </a:extLst>
+        </p:cNvPr>
+        <p:cNvGrpSpPr/>
+        <p:nvPr/>
+      </p:nvGrpSpPr>
+      <p:grpSpPr>
+        <a:xfrm>
+          <a:off x="0" y="0"/>
+          <a:ext cx="0" cy="0"/>
+          <a:chOff x="0" y="0"/>
+          <a:chExt cx="0" cy="0"/>
+        </a:xfrm>
+      </p:grpSpPr>
+      <p:sp>
+        <p:nvSpPr>
+          <p:cNvPr id="2" name="Título 1">
+            <a:extLst>
+              <a:ext uri="{FF2B5EF4-FFF2-40B4-BE49-F238E27FC236}">
+                <a16:creationId xmlns:a16="http://schemas.microsoft.com/office/drawing/2014/main" id="{80FA6CE4-EB24-601F-BBE8-358ECCDE501C}"/>
+              </a:ext>
+            </a:extLst>
+          </p:cNvPr>
+          <p:cNvSpPr>
+            <a:spLocks noGrp="1"/>
+          </p:cNvSpPr>
+          <p:nvPr>
+            <p:ph type="title"/>
+          </p:nvPr>
+        </p:nvSpPr>
+        <p:spPr>
+          <a:xfrm>
+            <a:off x="838200" y="195913"/>
+            <a:ext cx="10515600" cy="666729"/>
+          </a:xfrm>
+        </p:spPr>
+        <p:txBody>
+          <a:bodyPr>
+            <a:normAutofit fontScale="90000"/>
+          </a:bodyPr>
+          <a:lstStyle/>
+          <a:p>
+            <a:r>
+              <a:rPr lang="es-CO" dirty="0"/>
+              <a:t>Descripción de la problemática </a:t>
+            </a:r>
+          </a:p>
+        </p:txBody>
+      </p:sp>
+      <p:pic>
+        <p:nvPicPr>
+          <p:cNvPr id="8" name="Picture 7">
+            <a:extLst>
+              <a:ext uri="{FF2B5EF4-FFF2-40B4-BE49-F238E27FC236}">
+                <a16:creationId xmlns:a16="http://schemas.microsoft.com/office/drawing/2014/main" id="{68B3BB7F-141A-7FC9-07AF-7903B389E4CF}"/>
+              </a:ext>
+            </a:extLst>
+          </p:cNvPr>
+          <p:cNvPicPr>
+            <a:picLocks noChangeAspect="1"/>
+          </p:cNvPicPr>
+          <p:nvPr/>
+        </p:nvPicPr>
+        <p:blipFill>
+          <a:blip r:embed="rId2"/>
+          <a:stretch>
+            <a:fillRect/>
+          </a:stretch>
+        </p:blipFill>
+        <p:spPr>
+          <a:xfrm>
+            <a:off x="914400" y="1468211"/>
+            <a:ext cx="6694099" cy="3464979"/>
+          </a:xfrm>
+          <a:prstGeom prst="rect">
+            <a:avLst/>
+          </a:prstGeom>
+        </p:spPr>
+      </p:pic>
+      <p:sp>
+        <p:nvSpPr>
+          <p:cNvPr id="12" name="Marcador de contenido 2">
+            <a:extLst>
+              <a:ext uri="{FF2B5EF4-FFF2-40B4-BE49-F238E27FC236}">
+                <a16:creationId xmlns:a16="http://schemas.microsoft.com/office/drawing/2014/main" id="{CD3E5EE0-3D65-C346-9A41-AC304C818967}"/>
+              </a:ext>
+            </a:extLst>
+          </p:cNvPr>
+          <p:cNvSpPr>
+            <a:spLocks noGrp="1"/>
+          </p:cNvSpPr>
+          <p:nvPr>
+            <p:ph idx="1"/>
+          </p:nvPr>
+        </p:nvSpPr>
+        <p:spPr>
+          <a:xfrm>
+            <a:off x="838200" y="983553"/>
+            <a:ext cx="6226834" cy="3828726"/>
+          </a:xfrm>
+        </p:spPr>
+        <p:txBody>
+          <a:bodyPr>
+            <a:normAutofit/>
+          </a:bodyPr>
+          <a:lstStyle/>
+          <a:p>
+            <a:pPr marL="0" indent="0">
+              <a:buNone/>
+            </a:pPr>
+            <a:r>
+              <a:rPr lang="es-CO" sz="1400" dirty="0"/>
+              <a:t>Ejemplo de búsqueda de un modelo</a:t>
+            </a:r>
+          </a:p>
+        </p:txBody>
+      </p:sp>
+      <p:sp>
+        <p:nvSpPr>
+          <p:cNvPr id="13" name="TextBox 12">
+            <a:extLst>
+              <a:ext uri="{FF2B5EF4-FFF2-40B4-BE49-F238E27FC236}">
+                <a16:creationId xmlns:a16="http://schemas.microsoft.com/office/drawing/2014/main" id="{B5DED742-F6E4-06A4-839B-5153C1EDE9E8}"/>
+              </a:ext>
+            </a:extLst>
+          </p:cNvPr>
+          <p:cNvSpPr txBox="1"/>
+          <p:nvPr/>
+        </p:nvSpPr>
+        <p:spPr>
+          <a:xfrm>
+            <a:off x="7684699" y="3200700"/>
+            <a:ext cx="4341962" cy="3025444"/>
+          </a:xfrm>
+          <a:prstGeom prst="rect">
+            <a:avLst/>
+          </a:prstGeom>
+          <a:noFill/>
+        </p:spPr>
+        <p:txBody>
+          <a:bodyPr wrap="square">
+            <a:spAutoFit/>
+          </a:bodyPr>
+          <a:lstStyle/>
+          <a:p>
+            <a:pPr>
+              <a:lnSpc>
+                <a:spcPct val="90000"/>
+              </a:lnSpc>
+              <a:spcBef>
+                <a:spcPts val="1000"/>
+              </a:spcBef>
+              <a:buClr>
+                <a:srgbClr val="C00000"/>
+              </a:buClr>
+            </a:pPr>
+            <a:r>
+              <a:rPr lang="es-ES" sz="1600" b="1" dirty="0">
+                <a:solidFill>
+                  <a:srgbClr val="FF0000"/>
+                </a:solidFill>
+              </a:rPr>
+              <a:t>Necesidad Identificada</a:t>
+            </a:r>
+          </a:p>
+          <a:p>
+            <a:pPr>
+              <a:lnSpc>
+                <a:spcPct val="90000"/>
+              </a:lnSpc>
+              <a:spcBef>
+                <a:spcPts val="1000"/>
+              </a:spcBef>
+              <a:buClr>
+                <a:srgbClr val="C00000"/>
+              </a:buClr>
+            </a:pPr>
+            <a:r>
+              <a:rPr lang="es-ES" sz="1400" dirty="0"/>
+              <a:t>Como simplificar la búsqueda de un usuario que desea conocer, por ejemplo, los modelos especializados en convertir texto a imagen, que tengan menos de 9B de parámetros, que usen librerías como </a:t>
+            </a:r>
+            <a:r>
+              <a:rPr lang="es-ES" sz="1400" dirty="0" err="1"/>
+              <a:t>Diffursers</a:t>
+            </a:r>
+            <a:r>
+              <a:rPr lang="es-ES" sz="1400" dirty="0"/>
+              <a:t>, que estén en ingles y además desee filtrar por los autores que más publicaciones tengan en HF?  </a:t>
+            </a:r>
+          </a:p>
+          <a:p>
+            <a:pPr>
+              <a:lnSpc>
+                <a:spcPct val="90000"/>
+              </a:lnSpc>
+              <a:spcBef>
+                <a:spcPts val="1000"/>
+              </a:spcBef>
+              <a:buClr>
+                <a:srgbClr val="C00000"/>
+              </a:buClr>
+            </a:pPr>
+            <a:r>
+              <a:rPr lang="es-ES" sz="1400" dirty="0"/>
+              <a:t>O un usuario que desee conocer ¿cómo ha evolucionado la participación de los países latinoamericanos en </a:t>
+            </a:r>
+            <a:r>
+              <a:rPr lang="es-ES" sz="1400" dirty="0" err="1"/>
+              <a:t>Hugging</a:t>
+            </a:r>
+            <a:r>
+              <a:rPr lang="es-ES" sz="1400" dirty="0"/>
+              <a:t> </a:t>
+            </a:r>
+            <a:r>
+              <a:rPr lang="es-ES" sz="1400" dirty="0" err="1"/>
+              <a:t>Face</a:t>
+            </a:r>
+            <a:r>
+              <a:rPr lang="es-ES" sz="1400" dirty="0"/>
+              <a:t> y cuáles destacan por sus aportes?</a:t>
+            </a:r>
+          </a:p>
+          <a:p>
+            <a:pPr>
+              <a:lnSpc>
+                <a:spcPct val="90000"/>
+              </a:lnSpc>
+              <a:spcBef>
+                <a:spcPts val="1000"/>
+              </a:spcBef>
+              <a:buClr>
+                <a:srgbClr val="C00000"/>
+              </a:buClr>
+            </a:pPr>
+            <a:r>
+              <a:rPr lang="es-ES" sz="1400" dirty="0"/>
+              <a:t>Este tipo de preguntas requiere </a:t>
+            </a:r>
+            <a:r>
+              <a:rPr lang="es-ES" sz="1400" b="1" dirty="0"/>
+              <a:t>razonamiento global</a:t>
+            </a:r>
+            <a:r>
+              <a:rPr lang="es-ES" sz="1400" dirty="0"/>
+              <a:t>, contexto y relaciones entre entidades, algo que RAG por sí solo no logra.</a:t>
+            </a:r>
+          </a:p>
+        </p:txBody>
+      </p:sp>
+    </p:spTree>
+    <p:extLst>
+      <p:ext uri="{BB962C8B-B14F-4D97-AF65-F5344CB8AC3E}">
+        <p14:creationId xmlns:p14="http://schemas.microsoft.com/office/powerpoint/2010/main" val="2733782282"/>
+      </p:ext>
+    </p:extLst>
+  </p:cSld>
+  <p:clrMapOvr>
+    <a:masterClrMapping/>
+  </p:clrMapOvr>
+</p:sld>
+</file>
+
+<file path=ppt/slides/slide5.xml><?xml version="1.0" encoding="utf-8"?>
+<p:sld xmlns:a="http://schemas.openxmlformats.org/drawingml/2006/main" xmlns:r="http://schemas.openxmlformats.org/officeDocument/2006/relationships" xmlns:p="http://schemas.openxmlformats.org/presentationml/2006/main">
+  <p:cSld>
+    <p:spTree>
+      <p:nvGrpSpPr>
         <p:cNvPr id="1" name=""/>
         <p:cNvGrpSpPr/>
         <p:nvPr/>
@@ -8085,7 +9249,7 @@
         </p:nvSpPr>
         <p:spPr>
           <a:xfrm>
-            <a:off x="838200" y="195913"/>
+            <a:off x="424132" y="187286"/>
             <a:ext cx="10515600" cy="666729"/>
           </a:xfrm>
         </p:spPr>
@@ -8244,121 +9408,6 @@
           </a:p>
         </p:txBody>
       </p:sp>
-      <p:sp>
-        <p:nvSpPr>
-          <p:cNvPr id="5" name="TextBox 4">
-            <a:extLst>
-              <a:ext uri="{FF2B5EF4-FFF2-40B4-BE49-F238E27FC236}">
-                <a16:creationId xmlns:a16="http://schemas.microsoft.com/office/drawing/2014/main" id="{485FF881-B9D9-C953-D0E4-08741DFC9F0D}"/>
-              </a:ext>
-            </a:extLst>
-          </p:cNvPr>
-          <p:cNvSpPr txBox="1"/>
-          <p:nvPr/>
-        </p:nvSpPr>
-        <p:spPr>
-          <a:xfrm>
-            <a:off x="6983802" y="2244564"/>
-            <a:ext cx="5208198" cy="1862048"/>
-          </a:xfrm>
-          <a:prstGeom prst="rect">
-            <a:avLst/>
-          </a:prstGeom>
-          <a:noFill/>
-        </p:spPr>
-        <p:txBody>
-          <a:bodyPr wrap="square">
-            <a:spAutoFit/>
-          </a:bodyPr>
-          <a:lstStyle/>
-          <a:p>
-            <a:pPr>
-              <a:lnSpc>
-                <a:spcPct val="90000"/>
-              </a:lnSpc>
-              <a:spcBef>
-                <a:spcPts val="1000"/>
-              </a:spcBef>
-              <a:buClr>
-                <a:srgbClr val="C00000"/>
-              </a:buClr>
-            </a:pPr>
-            <a:r>
-              <a:rPr lang="es-ES" sz="1600" b="1" dirty="0"/>
-              <a:t>Necesidad Identificada</a:t>
-            </a:r>
-          </a:p>
-          <a:p>
-            <a:pPr>
-              <a:lnSpc>
-                <a:spcPct val="90000"/>
-              </a:lnSpc>
-              <a:spcBef>
-                <a:spcPts val="1000"/>
-              </a:spcBef>
-              <a:buClr>
-                <a:srgbClr val="C00000"/>
-              </a:buClr>
-            </a:pPr>
-            <a:r>
-              <a:rPr lang="es-ES" sz="1400" dirty="0"/>
-              <a:t>Resolver preguntas como:</a:t>
-            </a:r>
-          </a:p>
-          <a:p>
-            <a:pPr marL="228600" indent="-228600">
-              <a:lnSpc>
-                <a:spcPct val="90000"/>
-              </a:lnSpc>
-              <a:spcBef>
-                <a:spcPts val="1000"/>
-              </a:spcBef>
-              <a:buClr>
-                <a:srgbClr val="C00000"/>
-              </a:buClr>
-              <a:buFont typeface="Arial" panose="020B0604020202020204" pitchFamily="34" charset="0"/>
-              <a:buChar char="•"/>
-            </a:pPr>
-            <a:r>
-              <a:rPr lang="es-ES" sz="1400" dirty="0"/>
-              <a:t>“¿Cómo ha evolucionado la participación de los países latinoamericanos en </a:t>
-            </a:r>
-            <a:r>
-              <a:rPr lang="es-ES" sz="1400" dirty="0" err="1"/>
-              <a:t>Hugging</a:t>
-            </a:r>
-            <a:r>
-              <a:rPr lang="es-ES" sz="1400" dirty="0"/>
-              <a:t> </a:t>
-            </a:r>
-            <a:r>
-              <a:rPr lang="es-ES" sz="1400" dirty="0" err="1"/>
-              <a:t>Face</a:t>
-            </a:r>
-            <a:r>
-              <a:rPr lang="es-ES" sz="1400" dirty="0"/>
-              <a:t> y cuáles destacan por sus aportes?”</a:t>
-            </a:r>
-          </a:p>
-          <a:p>
-            <a:pPr>
-              <a:lnSpc>
-                <a:spcPct val="90000"/>
-              </a:lnSpc>
-              <a:spcBef>
-                <a:spcPts val="1000"/>
-              </a:spcBef>
-              <a:buClr>
-                <a:srgbClr val="C00000"/>
-              </a:buClr>
-            </a:pPr>
-            <a:r>
-              <a:rPr lang="es-ES" sz="1400" dirty="0"/>
-              <a:t>Este tipo de preguntas requiere razonamiento global, contexto y relaciones entre entidades, algo que RAG por sí solo no logra.</a:t>
-            </a:r>
-          </a:p>
-        </p:txBody>
-      </p:sp>
     </p:spTree>
     <p:extLst>
       <p:ext uri="{BB962C8B-B14F-4D97-AF65-F5344CB8AC3E}">
@@ -8372,7 +9421,7 @@
 </p:sld>
 </file>
 
-<file path=ppt/slides/slide3.xml><?xml version="1.0" encoding="utf-8"?>
+<file path=ppt/slides/slide6.xml><?xml version="1.0" encoding="utf-8"?>
 <p:sld xmlns:a="http://schemas.openxmlformats.org/drawingml/2006/main" xmlns:r="http://schemas.openxmlformats.org/officeDocument/2006/relationships" xmlns:p="http://schemas.openxmlformats.org/presentationml/2006/main">
   <p:cSld>
     <p:spTree>
@@ -8413,7 +9462,7 @@
         </p:nvSpPr>
         <p:spPr>
           <a:xfrm>
-            <a:off x="596661" y="1941085"/>
+            <a:off x="519023" y="888662"/>
             <a:ext cx="10515600" cy="3828726"/>
           </a:xfrm>
         </p:spPr>
@@ -8478,15 +9527,7 @@
           <a:p>
             <a:r>
               <a:rPr lang="es-ES" sz="1400" dirty="0"/>
-              <a:t>Grafo de </a:t>
-            </a:r>
-            <a:r>
-              <a:rPr lang="es-ES" sz="1400" dirty="0" err="1"/>
-              <a:t>conocomientos</a:t>
-            </a:r>
-            <a:r>
-              <a:rPr lang="es-ES" sz="1400" dirty="0"/>
-              <a:t> representa entidades y relaciones de manera explícita e interpretable.</a:t>
+              <a:t>Grafo de conocimientos representa entidades y relaciones de manera explícita e interpretable.</a:t>
             </a:r>
           </a:p>
           <a:p>
@@ -8509,6 +9550,88 @@
           </a:p>
           <a:p>
             <a:endParaRPr lang="en-US" sz="2400" dirty="0"/>
+          </a:p>
+        </p:txBody>
+      </p:sp>
+      <p:pic>
+        <p:nvPicPr>
+          <p:cNvPr id="2050" name="Picture 2" descr="Neo4j LLM Knowledge Graph Builder - Extract Nodes and Relationships from  Unstructured Text - Neo4j Labs">
+            <a:extLst>
+              <a:ext uri="{FF2B5EF4-FFF2-40B4-BE49-F238E27FC236}">
+                <a16:creationId xmlns:a16="http://schemas.microsoft.com/office/drawing/2014/main" id="{FA7692A7-1675-0E4F-B99C-1FB00C1D74D0}"/>
+              </a:ext>
+            </a:extLst>
+          </p:cNvPr>
+          <p:cNvPicPr>
+            <a:picLocks noChangeAspect="1" noChangeArrowheads="1"/>
+          </p:cNvPicPr>
+          <p:nvPr/>
+        </p:nvPicPr>
+        <p:blipFill>
+          <a:blip r:embed="rId2" cstate="print">
+            <a:extLst>
+              <a:ext uri="{28A0092B-C50C-407E-A947-70E740481C1C}">
+                <a14:useLocalDpi xmlns:a14="http://schemas.microsoft.com/office/drawing/2010/main" val="0"/>
+              </a:ext>
+            </a:extLst>
+          </a:blip>
+          <a:srcRect/>
+          <a:stretch>
+            <a:fillRect/>
+          </a:stretch>
+        </p:blipFill>
+        <p:spPr bwMode="auto">
+          <a:xfrm>
+            <a:off x="6093724" y="2344989"/>
+            <a:ext cx="5579253" cy="3865037"/>
+          </a:xfrm>
+          <a:prstGeom prst="rect">
+            <a:avLst/>
+          </a:prstGeom>
+          <a:noFill/>
+          <a:extLst>
+            <a:ext uri="{909E8E84-426E-40DD-AFC4-6F175D3DCCD1}">
+              <a14:hiddenFill xmlns:a14="http://schemas.microsoft.com/office/drawing/2010/main">
+                <a:solidFill>
+                  <a:srgbClr val="FFFFFF"/>
+                </a:solidFill>
+              </a14:hiddenFill>
+            </a:ext>
+          </a:extLst>
+        </p:spPr>
+      </p:pic>
+      <p:sp>
+        <p:nvSpPr>
+          <p:cNvPr id="3" name="TextBox 2">
+            <a:extLst>
+              <a:ext uri="{FF2B5EF4-FFF2-40B4-BE49-F238E27FC236}">
+                <a16:creationId xmlns:a16="http://schemas.microsoft.com/office/drawing/2014/main" id="{BDCED3CC-BC80-36AB-2F3C-B44F5C2F0219}"/>
+              </a:ext>
+            </a:extLst>
+          </p:cNvPr>
+          <p:cNvSpPr txBox="1"/>
+          <p:nvPr/>
+        </p:nvSpPr>
+        <p:spPr>
+          <a:xfrm>
+            <a:off x="6178669" y="6173715"/>
+            <a:ext cx="6094562" cy="276999"/>
+          </a:xfrm>
+          <a:prstGeom prst="rect">
+            <a:avLst/>
+          </a:prstGeom>
+          <a:noFill/>
+        </p:spPr>
+        <p:txBody>
+          <a:bodyPr wrap="square">
+            <a:spAutoFit/>
+          </a:bodyPr>
+          <a:lstStyle/>
+          <a:p>
+            <a:r>
+              <a:rPr lang="en-US" sz="1200" i="1" dirty="0"/>
+              <a:t>Fuente : https://neo4j.com/labs/genai-ecosystem/llm-graph-builder/</a:t>
+            </a:r>
           </a:p>
         </p:txBody>
       </p:sp>
@@ -8525,7 +9648,7 @@
 </p:sld>
 </file>
 
-<file path=ppt/slides/slide4.xml><?xml version="1.0" encoding="utf-8"?>
+<file path=ppt/slides/slide7.xml><?xml version="1.0" encoding="utf-8"?>
 <p:sld xmlns:a="http://schemas.openxmlformats.org/drawingml/2006/main" xmlns:r="http://schemas.openxmlformats.org/officeDocument/2006/relationships" xmlns:p="http://schemas.openxmlformats.org/presentationml/2006/main">
   <p:cSld>
     <p:spTree>
@@ -8761,7 +9884,7 @@
         <p:spPr>
           <a:xfrm>
             <a:off x="6096000" y="1086797"/>
-            <a:ext cx="5400135" cy="3808222"/>
+            <a:ext cx="5400135" cy="4776692"/>
           </a:xfrm>
           <a:prstGeom prst="rect">
             <a:avLst/>
@@ -8780,6 +9903,32 @@
             <a:r>
               <a:rPr lang="es-ES" b="1" dirty="0"/>
               <a:t>Métricas clave en la literatura</a:t>
+            </a:r>
+          </a:p>
+          <a:p>
+            <a:pPr>
+              <a:lnSpc>
+                <a:spcPct val="90000"/>
+              </a:lnSpc>
+              <a:spcBef>
+                <a:spcPts val="1000"/>
+              </a:spcBef>
+              <a:buClr>
+                <a:srgbClr val="C00000"/>
+              </a:buClr>
+            </a:pPr>
+            <a:r>
+              <a:rPr lang="es-ES" sz="1400" b="1" dirty="0"/>
+              <a:t>Exhaustividad</a:t>
+            </a:r>
+          </a:p>
+          <a:p>
+            <a:pPr>
+              <a:buNone/>
+            </a:pPr>
+            <a:r>
+              <a:rPr lang="es-ES" sz="1400" dirty="0"/>
+              <a:t>Evalúa si la respuesta cubre:</a:t>
             </a:r>
           </a:p>
           <a:p>
@@ -8797,17 +9946,8 @@
               <a:buChar char="•"/>
             </a:pPr>
             <a:r>
-              <a:rPr lang="es-ES" sz="1400" b="1" dirty="0"/>
-              <a:t>Exhaustividad</a:t>
-            </a:r>
-          </a:p>
-          <a:p>
-            <a:pPr>
-              <a:buNone/>
-            </a:pPr>
-            <a:r>
               <a:rPr lang="es-ES" sz="1400" dirty="0"/>
-              <a:t>Evalúa si la respuesta cubre:</a:t>
+              <a:t>Todos los temas relevantes</a:t>
             </a:r>
           </a:p>
           <a:p>
@@ -8826,7 +9966,33 @@
             </a:pPr>
             <a:r>
               <a:rPr lang="es-ES" sz="1400" dirty="0"/>
-              <a:t>Todos los temas relevantes</a:t>
+              <a:t>Todas las perspectivas presentes en el corpus</a:t>
+            </a:r>
+          </a:p>
+          <a:p>
+            <a:pPr>
+              <a:lnSpc>
+                <a:spcPct val="90000"/>
+              </a:lnSpc>
+              <a:spcBef>
+                <a:spcPts val="1000"/>
+              </a:spcBef>
+              <a:buClr>
+                <a:srgbClr val="C00000"/>
+              </a:buClr>
+            </a:pPr>
+            <a:r>
+              <a:rPr lang="es-ES" sz="1400" b="1" dirty="0"/>
+              <a:t>Diversidad</a:t>
+            </a:r>
+          </a:p>
+          <a:p>
+            <a:pPr>
+              <a:buNone/>
+            </a:pPr>
+            <a:r>
+              <a:rPr lang="es-ES" sz="1400" dirty="0"/>
+              <a:t>Mide:</a:t>
             </a:r>
           </a:p>
           <a:p>
@@ -8845,7 +10011,7 @@
             </a:pPr>
             <a:r>
               <a:rPr lang="es-ES" sz="1400" dirty="0"/>
-              <a:t>Todas las perspectivas presentes en el corpus</a:t>
+              <a:t>Cantidad de enfoques utilizados</a:t>
             </a:r>
           </a:p>
           <a:p>
@@ -8863,17 +10029,8 @@
               <a:buChar char="•"/>
             </a:pPr>
             <a:r>
-              <a:rPr lang="es-ES" sz="1400" b="1" dirty="0"/>
-              <a:t>Diversidad</a:t>
-            </a:r>
-          </a:p>
-          <a:p>
-            <a:pPr>
-              <a:buNone/>
-            </a:pPr>
-            <a:r>
               <a:rPr lang="es-ES" sz="1400" dirty="0"/>
-              <a:t>Mide:</a:t>
+              <a:t>Variedad conceptual</a:t>
             </a:r>
           </a:p>
           <a:p>
@@ -8892,11 +10049,11 @@
             </a:pPr>
             <a:r>
               <a:rPr lang="es-ES" sz="1400" dirty="0"/>
-              <a:t>Cantidad de enfoques utilizados</a:t>
-            </a:r>
-          </a:p>
-          <a:p>
-            <a:pPr marL="228600" indent="-228600">
+              <a:t>Riqueza de interpretaciones</a:t>
+            </a:r>
+          </a:p>
+          <a:p>
+            <a:pPr>
               <a:lnSpc>
                 <a:spcPct val="90000"/>
               </a:lnSpc>
@@ -8906,22 +10063,18 @@
               <a:buClr>
                 <a:srgbClr val="C00000"/>
               </a:buClr>
-              <a:buFont typeface="Arial" panose="020B0604020202020204" pitchFamily="34" charset="0"/>
-              <a:buChar char="•"/>
             </a:pPr>
             <a:r>
+              <a:rPr lang="es-ES" sz="1400" b="1" dirty="0"/>
+              <a:t>Empoderamiento</a:t>
+            </a:r>
+            <a:r>
               <a:rPr lang="es-ES" sz="1400" dirty="0"/>
-              <a:t>Variedad conceptual</a:t>
-            </a:r>
-          </a:p>
-          <a:p>
-            <a:pPr marL="228600" indent="-228600">
-              <a:lnSpc>
-                <a:spcPct val="90000"/>
-              </a:lnSpc>
-              <a:spcBef>
-                <a:spcPts val="1000"/>
-              </a:spcBef>
+              <a:t> </a:t>
+            </a:r>
+          </a:p>
+          <a:p>
+            <a:pPr marL="285750" indent="-285750">
               <a:buClr>
                 <a:srgbClr val="C00000"/>
               </a:buClr>
@@ -8930,7 +10083,7 @@
             </a:pPr>
             <a:r>
               <a:rPr lang="es-ES" sz="1400" dirty="0"/>
-              <a:t>Riqueza de interpretaciones</a:t>
+              <a:t>Que tan bien la respuesta ayuda al usuario a alcanzar un entendimiento para tomar decisiones informadas acerca del dominio.</a:t>
             </a:r>
           </a:p>
           <a:p>
@@ -8977,7 +10130,7 @@
         <p:spPr>
           <a:xfrm>
             <a:off x="6096000" y="1086797"/>
-            <a:ext cx="5257803" cy="3864765"/>
+            <a:ext cx="5257803" cy="4776692"/>
           </a:xfrm>
           <a:prstGeom prst="rect">
             <a:avLst/>
@@ -9025,7 +10178,7 @@
 </p:sld>
 </file>
 
-<file path=ppt/slides/slide5.xml><?xml version="1.0" encoding="utf-8"?>
+<file path=ppt/slides/slide8.xml><?xml version="1.0" encoding="utf-8"?>
 <p:sld xmlns:a="http://schemas.openxmlformats.org/drawingml/2006/main" xmlns:r="http://schemas.openxmlformats.org/officeDocument/2006/relationships" xmlns:p="http://schemas.openxmlformats.org/presentationml/2006/main">
   <p:cSld>
     <p:spTree>
@@ -9101,7 +10254,7 @@
         </p:nvSpPr>
         <p:spPr>
           <a:xfrm>
-            <a:off x="838197" y="1687833"/>
+            <a:off x="838197" y="1178874"/>
             <a:ext cx="5088147" cy="1897670"/>
           </a:xfrm>
         </p:spPr>
@@ -9252,7 +10405,7 @@
 </p:sld>
 </file>
 
-<file path=ppt/slides/slide6.xml><?xml version="1.0" encoding="utf-8"?>
+<file path=ppt/slides/slide9.xml><?xml version="1.0" encoding="utf-8"?>
 <p:sld xmlns:a="http://schemas.openxmlformats.org/drawingml/2006/main" xmlns:r="http://schemas.openxmlformats.org/officeDocument/2006/relationships" xmlns:p="http://schemas.openxmlformats.org/presentationml/2006/main">
   <p:cSld>
     <p:spTree>
@@ -9447,7 +10600,7 @@
             </a:r>
             <a:r>
               <a:rPr lang="es-ES" dirty="0"/>
-              <a:t> sobre un grafo de conocimiento, con el fin de generar contextos semánticamente relevantes para consultas en lenguaje natural. El sistema combinará este contexto con la consulta original y lo procesará mediante un modelo de lenguaje de gran escala (LLM) para producir respuestas precisas y contextualizadas. </a:t>
+              <a:t> sobre un grafo de conocimiento, con el fin de generar contextos semánticamente relevantes para consultas en lenguaje natural. </a:t>
             </a:r>
             <a:endParaRPr lang="en-US" dirty="0"/>
           </a:p>
@@ -9503,7 +10656,11 @@
             </a:r>
             <a:r>
               <a:rPr lang="es-ES" dirty="0"/>
-              <a:t> sobre un corpus específico, y un segundo LLM para evaluar las respuestas generadas según criterios predefinidos.</a:t>
+              <a:t> sobre un corpus específico, y un segundo LLM para evaluar las respuestas generadas según criterios predefinidos y poder comparar una implementación de RAG tradicional con </a:t>
+            </a:r>
+            <a:r>
+              <a:rPr lang="es-ES" dirty="0" err="1"/>
+              <a:t>graphRAG</a:t>
             </a:r>
             <a:endParaRPr lang="en-US" dirty="0"/>
           </a:p>
@@ -9532,303 +10689,6 @@
     <p:extLst>
       <p:ext uri="{BB962C8B-B14F-4D97-AF65-F5344CB8AC3E}">
         <p14:creationId xmlns:p14="http://schemas.microsoft.com/office/powerpoint/2010/main" val="1843032193"/>
-      </p:ext>
-    </p:extLst>
-  </p:cSld>
-  <p:clrMapOvr>
-    <a:masterClrMapping/>
-  </p:clrMapOvr>
-</p:sld>
-</file>
-
-<file path=ppt/slides/slide7.xml><?xml version="1.0" encoding="utf-8"?>
-<p:sld xmlns:a="http://schemas.openxmlformats.org/drawingml/2006/main" xmlns:r="http://schemas.openxmlformats.org/officeDocument/2006/relationships" xmlns:p="http://schemas.openxmlformats.org/presentationml/2006/main">
-  <p:cSld>
-    <p:spTree>
-      <p:nvGrpSpPr>
-        <p:cNvPr id="1" name="">
-          <a:extLst>
-            <a:ext uri="{FF2B5EF4-FFF2-40B4-BE49-F238E27FC236}">
-              <a16:creationId xmlns:a16="http://schemas.microsoft.com/office/drawing/2014/main" id="{C37B7228-28FD-8FF9-12CD-D59DF1A3D68D}"/>
-            </a:ext>
-          </a:extLst>
-        </p:cNvPr>
-        <p:cNvGrpSpPr/>
-        <p:nvPr/>
-      </p:nvGrpSpPr>
-      <p:grpSpPr>
-        <a:xfrm>
-          <a:off x="0" y="0"/>
-          <a:ext cx="0" cy="0"/>
-          <a:chOff x="0" y="0"/>
-          <a:chExt cx="0" cy="0"/>
-        </a:xfrm>
-      </p:grpSpPr>
-      <p:sp>
-        <p:nvSpPr>
-          <p:cNvPr id="2" name="Título 1">
-            <a:extLst>
-              <a:ext uri="{FF2B5EF4-FFF2-40B4-BE49-F238E27FC236}">
-                <a16:creationId xmlns:a16="http://schemas.microsoft.com/office/drawing/2014/main" id="{A3D015FC-D29A-8584-9A6F-9EF6556DFE3F}"/>
-              </a:ext>
-            </a:extLst>
-          </p:cNvPr>
-          <p:cNvSpPr>
-            <a:spLocks noGrp="1"/>
-          </p:cNvSpPr>
-          <p:nvPr>
-            <p:ph type="title"/>
-          </p:nvPr>
-        </p:nvSpPr>
-        <p:spPr>
-          <a:xfrm>
-            <a:off x="838200" y="189884"/>
-            <a:ext cx="10515600" cy="1325563"/>
-          </a:xfrm>
-        </p:spPr>
-        <p:txBody>
-          <a:bodyPr/>
-          <a:lstStyle/>
-          <a:p>
-            <a:r>
-              <a:rPr lang="es-CO" dirty="0"/>
-              <a:t>Metodología </a:t>
-            </a:r>
-          </a:p>
-        </p:txBody>
-      </p:sp>
-      <p:pic>
-        <p:nvPicPr>
-          <p:cNvPr id="4" name="Picture 3">
-            <a:extLst>
-              <a:ext uri="{FF2B5EF4-FFF2-40B4-BE49-F238E27FC236}">
-                <a16:creationId xmlns:a16="http://schemas.microsoft.com/office/drawing/2014/main" id="{CEEA1A9E-4D9A-3E23-B583-777B73502236}"/>
-              </a:ext>
-            </a:extLst>
-          </p:cNvPr>
-          <p:cNvPicPr>
-            <a:picLocks noChangeAspect="1"/>
-          </p:cNvPicPr>
-          <p:nvPr/>
-        </p:nvPicPr>
-        <p:blipFill>
-          <a:blip r:embed="rId2"/>
-          <a:stretch>
-            <a:fillRect/>
-          </a:stretch>
-        </p:blipFill>
-        <p:spPr bwMode="auto">
-          <a:xfrm>
-            <a:off x="1459858" y="1662497"/>
-            <a:ext cx="8305244" cy="3533006"/>
-          </a:xfrm>
-          <a:prstGeom prst="rect">
-            <a:avLst/>
-          </a:prstGeom>
-        </p:spPr>
-      </p:pic>
-    </p:spTree>
-    <p:extLst>
-      <p:ext uri="{BB962C8B-B14F-4D97-AF65-F5344CB8AC3E}">
-        <p14:creationId xmlns:p14="http://schemas.microsoft.com/office/powerpoint/2010/main" val="68818214"/>
-      </p:ext>
-    </p:extLst>
-  </p:cSld>
-  <p:clrMapOvr>
-    <a:masterClrMapping/>
-  </p:clrMapOvr>
-</p:sld>
-</file>
-
-<file path=ppt/slides/slide8.xml><?xml version="1.0" encoding="utf-8"?>
-<p:sld xmlns:a="http://schemas.openxmlformats.org/drawingml/2006/main" xmlns:r="http://schemas.openxmlformats.org/officeDocument/2006/relationships" xmlns:p="http://schemas.openxmlformats.org/presentationml/2006/main">
-  <p:cSld>
-    <p:spTree>
-      <p:nvGrpSpPr>
-        <p:cNvPr id="1" name="">
-          <a:extLst>
-            <a:ext uri="{FF2B5EF4-FFF2-40B4-BE49-F238E27FC236}">
-              <a16:creationId xmlns:a16="http://schemas.microsoft.com/office/drawing/2014/main" id="{EC39B1CB-7493-05BA-1DEE-35A37FAEE45D}"/>
-            </a:ext>
-          </a:extLst>
-        </p:cNvPr>
-        <p:cNvGrpSpPr/>
-        <p:nvPr/>
-      </p:nvGrpSpPr>
-      <p:grpSpPr>
-        <a:xfrm>
-          <a:off x="0" y="0"/>
-          <a:ext cx="0" cy="0"/>
-          <a:chOff x="0" y="0"/>
-          <a:chExt cx="0" cy="0"/>
-        </a:xfrm>
-      </p:grpSpPr>
-      <p:sp>
-        <p:nvSpPr>
-          <p:cNvPr id="2" name="Título 1">
-            <a:extLst>
-              <a:ext uri="{FF2B5EF4-FFF2-40B4-BE49-F238E27FC236}">
-                <a16:creationId xmlns:a16="http://schemas.microsoft.com/office/drawing/2014/main" id="{DB48ED13-4D91-99F3-0A00-6D5FB8B7C240}"/>
-              </a:ext>
-            </a:extLst>
-          </p:cNvPr>
-          <p:cNvSpPr>
-            <a:spLocks noGrp="1"/>
-          </p:cNvSpPr>
-          <p:nvPr>
-            <p:ph type="title"/>
-          </p:nvPr>
-        </p:nvSpPr>
-        <p:spPr>
-          <a:xfrm>
-            <a:off x="838200" y="189884"/>
-            <a:ext cx="10515600" cy="1325563"/>
-          </a:xfrm>
-        </p:spPr>
-        <p:txBody>
-          <a:bodyPr/>
-          <a:lstStyle/>
-          <a:p>
-            <a:r>
-              <a:rPr lang="es-CO" dirty="0"/>
-              <a:t>Metodología </a:t>
-            </a:r>
-          </a:p>
-        </p:txBody>
-      </p:sp>
-      <p:pic>
-        <p:nvPicPr>
-          <p:cNvPr id="3" name="Image2">
-            <a:extLst>
-              <a:ext uri="{FF2B5EF4-FFF2-40B4-BE49-F238E27FC236}">
-                <a16:creationId xmlns:a16="http://schemas.microsoft.com/office/drawing/2014/main" id="{98C4C66D-3508-DD59-E7C8-450D30C99005}"/>
-              </a:ext>
-            </a:extLst>
-          </p:cNvPr>
-          <p:cNvPicPr>
-            <a:picLocks noChangeAspect="1"/>
-          </p:cNvPicPr>
-          <p:nvPr/>
-        </p:nvPicPr>
-        <p:blipFill>
-          <a:blip r:embed="rId2"/>
-          <a:stretch>
-            <a:fillRect/>
-          </a:stretch>
-        </p:blipFill>
-        <p:spPr bwMode="auto">
-          <a:xfrm>
-            <a:off x="1026165" y="2329108"/>
-            <a:ext cx="9936394" cy="2199784"/>
-          </a:xfrm>
-          <a:prstGeom prst="rect">
-            <a:avLst/>
-          </a:prstGeom>
-        </p:spPr>
-      </p:pic>
-    </p:spTree>
-    <p:extLst>
-      <p:ext uri="{BB962C8B-B14F-4D97-AF65-F5344CB8AC3E}">
-        <p14:creationId xmlns:p14="http://schemas.microsoft.com/office/powerpoint/2010/main" val="641787714"/>
-      </p:ext>
-    </p:extLst>
-  </p:cSld>
-  <p:clrMapOvr>
-    <a:masterClrMapping/>
-  </p:clrMapOvr>
-</p:sld>
-</file>
-
-<file path=ppt/slides/slide9.xml><?xml version="1.0" encoding="utf-8"?>
-<p:sld xmlns:a="http://schemas.openxmlformats.org/drawingml/2006/main" xmlns:r="http://schemas.openxmlformats.org/officeDocument/2006/relationships" xmlns:p="http://schemas.openxmlformats.org/presentationml/2006/main">
-  <p:cSld>
-    <p:spTree>
-      <p:nvGrpSpPr>
-        <p:cNvPr id="1" name="">
-          <a:extLst>
-            <a:ext uri="{FF2B5EF4-FFF2-40B4-BE49-F238E27FC236}">
-              <a16:creationId xmlns:a16="http://schemas.microsoft.com/office/drawing/2014/main" id="{77F7C023-E280-A685-D766-F2957FFAF0F8}"/>
-            </a:ext>
-          </a:extLst>
-        </p:cNvPr>
-        <p:cNvGrpSpPr/>
-        <p:nvPr/>
-      </p:nvGrpSpPr>
-      <p:grpSpPr>
-        <a:xfrm>
-          <a:off x="0" y="0"/>
-          <a:ext cx="0" cy="0"/>
-          <a:chOff x="0" y="0"/>
-          <a:chExt cx="0" cy="0"/>
-        </a:xfrm>
-      </p:grpSpPr>
-      <p:sp>
-        <p:nvSpPr>
-          <p:cNvPr id="2" name="Título 1">
-            <a:extLst>
-              <a:ext uri="{FF2B5EF4-FFF2-40B4-BE49-F238E27FC236}">
-                <a16:creationId xmlns:a16="http://schemas.microsoft.com/office/drawing/2014/main" id="{DA7E848D-8A47-CE8E-3463-BBADEDAFE915}"/>
-              </a:ext>
-            </a:extLst>
-          </p:cNvPr>
-          <p:cNvSpPr>
-            <a:spLocks noGrp="1"/>
-          </p:cNvSpPr>
-          <p:nvPr>
-            <p:ph type="title"/>
-          </p:nvPr>
-        </p:nvSpPr>
-        <p:spPr>
-          <a:xfrm>
-            <a:off x="838200" y="62390"/>
-            <a:ext cx="10515600" cy="1325563"/>
-          </a:xfrm>
-        </p:spPr>
-        <p:txBody>
-          <a:bodyPr/>
-          <a:lstStyle/>
-          <a:p>
-            <a:r>
-              <a:rPr lang="es-CO" dirty="0"/>
-              <a:t>Metodología </a:t>
-            </a:r>
-          </a:p>
-        </p:txBody>
-      </p:sp>
-      <p:graphicFrame>
-        <p:nvGraphicFramePr>
-          <p:cNvPr id="5" name="Marcador de contenido 2">
-            <a:extLst>
-              <a:ext uri="{FF2B5EF4-FFF2-40B4-BE49-F238E27FC236}">
-                <a16:creationId xmlns:a16="http://schemas.microsoft.com/office/drawing/2014/main" id="{8DF60821-9F66-0239-9CAE-4C1564F108F9}"/>
-              </a:ext>
-            </a:extLst>
-          </p:cNvPr>
-          <p:cNvGraphicFramePr>
-            <a:graphicFrameLocks/>
-          </p:cNvGraphicFramePr>
-          <p:nvPr>
-            <p:extLst>
-              <p:ext uri="{D42A27DB-BD31-4B8C-83A1-F6EECF244321}">
-                <p14:modId xmlns:p14="http://schemas.microsoft.com/office/powerpoint/2010/main" val="4179210871"/>
-              </p:ext>
-            </p:extLst>
-          </p:nvPr>
-        </p:nvGraphicFramePr>
-        <p:xfrm>
-          <a:off x="838200" y="1105302"/>
-          <a:ext cx="9909319" cy="5106838"/>
-        </p:xfrm>
-        <a:graphic>
-          <a:graphicData uri="http://schemas.openxmlformats.org/drawingml/2006/diagram">
-            <dgm:relIds xmlns:dgm="http://schemas.openxmlformats.org/drawingml/2006/diagram" xmlns:r="http://schemas.openxmlformats.org/officeDocument/2006/relationships" r:dm="rId2" r:lo="rId3" r:qs="rId4" r:cs="rId5"/>
-          </a:graphicData>
-        </a:graphic>
-      </p:graphicFrame>
-    </p:spTree>
-    <p:extLst>
-      <p:ext uri="{BB962C8B-B14F-4D97-AF65-F5344CB8AC3E}">
-        <p14:creationId xmlns:p14="http://schemas.microsoft.com/office/powerpoint/2010/main" val="4074060335"/>
       </p:ext>
     </p:extLst>
   </p:cSld>

--- a/Presentacion propuesta TG.pptx
+++ b/Presentacion propuesta TG.pptx
@@ -4808,7 +4808,7 @@
           <a:p>
             <a:fld id="{A2A58399-82A5-4F04-8671-5E74070C5E00}" type="datetimeFigureOut">
               <a:rPr lang="es-CO" smtClean="0"/>
-              <a:t>2/12/2025</a:t>
+              <a:t>4/12/2025</a:t>
             </a:fld>
             <a:endParaRPr lang="es-CO"/>
           </a:p>
@@ -6544,7 +6544,7 @@
           <a:p>
             <a:fld id="{AF0FCD54-9834-4BE8-9B5B-EEF02B5391B3}" type="datetimeFigureOut">
               <a:rPr lang="es-CO" smtClean="0"/>
-              <a:t>2/12/2025</a:t>
+              <a:t>4/12/2025</a:t>
             </a:fld>
             <a:endParaRPr lang="es-CO"/>
           </a:p>
@@ -10560,7 +10560,7 @@
             </a:r>
             <a:r>
               <a:rPr lang="es-ES" dirty="0"/>
-              <a:t>, seguido de la configuración del entorno en Neo4j para validar la estructura y el esquema del grafo de conocimiento.</a:t>
+              <a:t>, seguido de la configuración del entorno en Neo4j para construir el grafo de conocimientos.</a:t>
             </a:r>
             <a:endParaRPr lang="en-US" dirty="0"/>
           </a:p>
